--- a/cursos/recursos/desequilibrios-de-material/18-desequilibrios-en-la-practica-i.pptx
+++ b/cursos/recursos/desequilibrios-de-material/18-desequilibrios-en-la-practica-i.pptx
@@ -10110,7 +10110,7 @@
                 </a:solidFill>
                 <a:latin typeface="Calibri"/>
               </a:rPr>
-              <a:t>Elegí tres de los fragmentos de esta lección y, antes de mover una sola pieza en el tablero, escribí en una frase qué desequilibrio te parece más favorable y para quién. Después jugá cada posición contra el motor y compará su evaluación con tu diagnóstico inicial, prestando atención a Caruana–Naiditsch y al efecto de 31.Qd3!.</a:t>
+              <a:t>Elegí tres de los fragmentos de esta lección y, antes de mover una sola pieza en el tablero, escribí en una frase qué desequilibrio te parece más favorable y para quién. Después jugá cada posición contra el motor y compará su evaluación con tu diagnóstico inicial, prestando atención a Caruana–Naiditsch y al efecto de 31.Dd3!.</a:t>
             </a:r>
           </a:p>
           <a:p>
@@ -10515,7 +10515,7 @@
                 </a:solidFill>
                 <a:latin typeface="Calibri"/>
               </a:rPr>
-              <a:t>Caruana–Naiditsch es el ejemplo más citado del grupo: el sacrificio de peón 31.Qd3! crea una posición ganadora prácticamente de la nada, mostrando en su forma más pura la idea de pensar más allá del material inmediato. El resto de los fragmentos de la lección (entre ellos Flores Rios–Diaz, Artemiev–Izoria, Carlsen–Esipenko, Arancibia–Flores Rios y Giri–Vachier-Lagrave) recorren, en formato breve, varios de los desequilibrios ya vistos en el curso, sirviendo como entrenamiento de reconocimiento rápido de patrones antes de entrar en la última lección.</a:t>
+              <a:t>Caruana–Naiditsch es el ejemplo más citado del grupo: el sacrificio de peón 31.Dd3! crea una posición ganadora prácticamente de la nada, mostrando en su forma más pura la idea de pensar más allá del material inmediato. El resto de los fragmentos de la lección (entre ellos Flores Rios–Diaz, Artemiev–Izoria, Carlsen–Esipenko, Arancibia–Flores Rios y Giri–Vachier-Lagrave) recorren, en formato breve, varios de los desequilibrios ya vistos en el curso, sirviendo como entrenamiento de reconocimiento rápido de patrones antes de entrar en la última lección.</a:t>
             </a:r>
           </a:p>
         </p:txBody>

--- a/cursos/recursos/desequilibrios-de-material/18-desequilibrios-en-la-practica-i.pptx
+++ b/cursos/recursos/desequilibrios-de-material/18-desequilibrios-en-la-practica-i.pptx
@@ -3490,7 +3490,7 @@
                 </a:solidFill>
                 <a:latin typeface="Calibri"/>
               </a:rPr>
-              <a:t>Pista: Pensá en un salto de caballo hacia el centro que amenace un jaque si el caballo negro ocupa cualquiera de esas dos casillas.</a:t>
+              <a:t>Pista: Piensa en un salto de caballo hacia el centro que amenace un jaque si el caballo negro ocupa cualquiera de esas dos casillas.</a:t>
             </a:r>
           </a:p>
         </p:txBody>
@@ -4345,7 +4345,7 @@
                 </a:solidFill>
                 <a:latin typeface="Calibri"/>
               </a:rPr>
-              <a:t>Pista: Pensá en capturar con la torre sobre una pieza defendida en el centro-izquierda del tablero.</a:t>
+              <a:t>Pista: Piensa en capturar con la torre sobre una pieza defendida en el centro-izquierda del tablero.</a:t>
             </a:r>
           </a:p>
         </p:txBody>
@@ -4668,7 +4668,7 @@
                 </a:solidFill>
                 <a:latin typeface="Calibri"/>
               </a:rPr>
-              <a:t>Pista: Pensá en avanzar el peón central una casilla más, ofreciéndolo como sacrificio.</a:t>
+              <a:t>Pista: Piensa en avanzar el peón central una casilla más, ofreciéndolo como sacrificio.</a:t>
             </a:r>
           </a:p>
         </p:txBody>
@@ -4991,7 +4991,7 @@
                 </a:solidFill>
                 <a:latin typeface="Calibri"/>
               </a:rPr>
-              <a:t>Pista: Pensá en entregar la torre con jaque, obligando al rey a capturarla.</a:t>
+              <a:t>Pista: Piensa en entregar la torre con jaque, obligando al rey a capturarla.</a:t>
             </a:r>
           </a:p>
         </p:txBody>
@@ -6021,7 +6021,7 @@
                 </a:solidFill>
                 <a:latin typeface="Calibri"/>
               </a:rPr>
-              <a:t>Pista: Pensá en capturar con la torre sobre un peón central bien defendido.</a:t>
+              <a:t>Pista: Piensa en capturar con la torre sobre un peón central bien defendido.</a:t>
             </a:r>
           </a:p>
         </p:txBody>
@@ -6344,7 +6344,7 @@
                 </a:solidFill>
                 <a:latin typeface="Calibri"/>
               </a:rPr>
-              <a:t>Pista: Pensá en un jaque de alfil desde una casilla cercana al rey negro, que no deje alternativas razonables.</a:t>
+              <a:t>Pista: Piensa en un jaque de alfil desde una casilla cercana al rey negro, que no deje alternativas razonables.</a:t>
             </a:r>
           </a:p>
         </p:txBody>
@@ -7199,7 +7199,7 @@
                 </a:solidFill>
                 <a:latin typeface="Calibri"/>
               </a:rPr>
-              <a:t>Pista: Pensá en un nuevo avance de peón en el flanco de dama que abra líneas hacia los peones débiles negros.</a:t>
+              <a:t>Pista: Piensa en un nuevo avance de peón en el flanco de dama que abra líneas hacia los peones débiles negros.</a:t>
             </a:r>
           </a:p>
         </p:txBody>
@@ -8054,7 +8054,7 @@
                 </a:solidFill>
                 <a:latin typeface="Calibri"/>
               </a:rPr>
-              <a:t>Pista: Pensá en un nuevo avance de peón en el flanco de dama que gane más espacio antes de resolver la tensión.</a:t>
+              <a:t>Pista: Piensa en un nuevo avance de peón en el flanco de dama que gane más espacio antes de resolver la tensión.</a:t>
             </a:r>
           </a:p>
         </p:txBody>
@@ -8536,7 +8536,7 @@
                 </a:solidFill>
                 <a:latin typeface="Calibri"/>
               </a:rPr>
-              <a:t>Pista: Pensá en capturar con un peón central sobre la casilla f5, abriendo líneas hacia el enroque negro.</a:t>
+              <a:t>Pista: Piensa en capturar con un peón central sobre la casilla f5, abriendo líneas hacia el enroque negro.</a:t>
             </a:r>
           </a:p>
         </p:txBody>
@@ -9391,7 +9391,7 @@
                 </a:solidFill>
                 <a:latin typeface="Calibri"/>
               </a:rPr>
-              <a:t>Pista: Pensá en reubicar el alfil hacia una casilla desde la que pueda entrar en f7 en la próxima jugada.</a:t>
+              <a:t>Pista: Piensa en reubicar el alfil hacia una casilla desde la que pueda entrar en f7 en la próxima jugada.</a:t>
             </a:r>
           </a:p>
         </p:txBody>
@@ -9714,7 +9714,7 @@
                 </a:solidFill>
                 <a:latin typeface="Calibri"/>
               </a:rPr>
-              <a:t>Pista: Pensá en capturar con el alfil un peón negro que está defendido sólo por el rey.</a:t>
+              <a:t>Pista: Piensa en capturar con el alfil un peón negro que está defendido sólo por el rey.</a:t>
             </a:r>
           </a:p>
         </p:txBody>
@@ -10110,7 +10110,7 @@
                 </a:solidFill>
                 <a:latin typeface="Calibri"/>
               </a:rPr>
-              <a:t>Elegí tres de los fragmentos de esta lección y, antes de mover una sola pieza en el tablero, escribí en una frase qué desequilibrio te parece más favorable y para quién. Después jugá cada posición contra el motor y compará su evaluación con tu diagnóstico inicial, prestando atención a Caruana–Naiditsch y al efecto de 31.Dd3!.</a:t>
+              <a:t>Elige tres de los fragmentos de esta lección y, antes de mover una sola pieza en el tablero, escribe en una frase qué desequilibrio te parece más favorable y para quién. Después juega cada posición contra el motor y compará su evaluación con tu diagnóstico inicial, prestando atención a Caruana–Naiditsch y al efecto de 31.Dd3!.</a:t>
             </a:r>
           </a:p>
           <a:p>
@@ -10142,7 +10142,7 @@
                 </a:solidFill>
                 <a:latin typeface="Calibri"/>
               </a:rPr>
-              <a:t>En la página del curso podés recorrer cada partida con los comentarios, adivinar las jugadas clave en el tablero y continuar cualquier posición contra el motor (Stockfish). La hoja de ejercicios en PDF reúne los momentos clave de esta lección para resolver sin tablero.</a:t>
+              <a:t>En la página del curso puedes recorrer cada partida con los comentarios, adivinar las jugadas clave en el tablero y continuar cualquier posición contra el motor (Stockfish). La hoja de ejercicios en PDF reúne los momentos clave de esta lección para resolver sin tablero.</a:t>
             </a:r>
           </a:p>
         </p:txBody>
@@ -10181,7 +10181,7 @@
                 </a:solidFill>
                 <a:latin typeface="Calibri"/>
               </a:rPr>
-              <a:t>•  Primero recorré la partida completa leyendo los comentarios.</a:t>
+              <a:t>•  Primero recorre la partida completa leyendo los comentarios.</a:t>
             </a:r>
           </a:p>
           <a:p>
@@ -10197,7 +10197,7 @@
                 </a:solidFill>
                 <a:latin typeface="Calibri"/>
               </a:rPr>
-              <a:t>•  Después hacé el modo "adivinar las jugadas clave" hasta acertar todas.</a:t>
+              <a:t>•  Después haz el modo "adivinar las jugadas clave" hasta acertar todas.</a:t>
             </a:r>
           </a:p>
           <a:p>
@@ -10213,7 +10213,7 @@
                 </a:solidFill>
                 <a:latin typeface="Calibri"/>
               </a:rPr>
-              <a:t>•  Por último respondé el cuestionario y anotá con tus palabras las reglas de la lección.</a:t>
+              <a:t>•  Por último responde el cuestionario y anota con tus palabras las reglas de la lección.</a:t>
             </a:r>
           </a:p>
         </p:txBody>
@@ -10658,7 +10658,7 @@
                 </a:solidFill>
                 <a:latin typeface="Calibri"/>
               </a:rPr>
-              <a:t>•  Frente a cualquier posición, preguntate primero qué desequilibrio resultaría de cada cambio posible.</a:t>
+              <a:t>•  Frente a cualquier posición, pregúntate primero qué desequilibrio resultaría de cada cambio posible.</a:t>
             </a:r>
           </a:p>
           <a:p>
@@ -10674,7 +10674,7 @@
                 </a:solidFill>
                 <a:latin typeface="Calibri"/>
               </a:rPr>
-              <a:t>•  Evaluá antes de calcular: decidí qué bando tiene el plan más claro antes de buscar variantes concretas.</a:t>
+              <a:t>•  Evalúa antes de calcular: decide qué bando tiene el plan más claro antes de buscar variantes concretas.</a:t>
             </a:r>
           </a:p>
           <a:p>
@@ -10706,7 +10706,7 @@
                 </a:solidFill>
                 <a:latin typeface="Calibri"/>
               </a:rPr>
-              <a:t>•  No apliques mecánicamente un principio aprendido: verificá que corresponda al tipo exacto de posición.</a:t>
+              <a:t>•  No apliques mecánicamente un principio aprendido: verifica que corresponda al tipo exacto de posición.</a:t>
             </a:r>
           </a:p>
           <a:p>
@@ -10722,7 +10722,7 @@
                 </a:solidFill>
                 <a:latin typeface="Calibri"/>
               </a:rPr>
-              <a:t>•  Usá estos ejemplos breves como entrenamiento de reconocimiento rápido, no como partidas para memorizar de memoria.</a:t>
+              <a:t>•  Usa estos ejemplos breves como entrenamiento de reconocimiento rápido, no como partidas para memorizar de memoria.</a:t>
             </a:r>
           </a:p>
         </p:txBody>
@@ -11324,7 +11324,7 @@
                 </a:solidFill>
                 <a:latin typeface="Calibri"/>
               </a:rPr>
-              <a:t>Pista: Pensá en una jugada de dama que no capture el peón c4, sino que se reubique, ofreciendo material a cambio de actividad.</a:t>
+              <a:t>Pista: Piensa en una jugada de dama que no capture el peón c4, sino que se reubique, ofreciendo material a cambio de actividad.</a:t>
             </a:r>
           </a:p>
         </p:txBody>

--- a/cursos/recursos/desequilibrios-de-material/18-desequilibrios-en-la-practica-i.pptx
+++ b/cursos/recursos/desequilibrios-de-material/18-desequilibrios-en-la-practica-i.pptx
@@ -3490,7 +3490,7 @@
                 </a:solidFill>
                 <a:latin typeface="Calibri"/>
               </a:rPr>
-              <a:t>Pista: Pensá en un salto de caballo hacia el centro que amenace un jaque si el caballo negro ocupa cualquiera de esas dos casillas.</a:t>
+              <a:t>Pista: Piensa en un salto de caballo hacia el centro que amenace un jaque si el caballo negro ocupa cualquiera de esas dos casillas.</a:t>
             </a:r>
           </a:p>
         </p:txBody>
@@ -4345,7 +4345,7 @@
                 </a:solidFill>
                 <a:latin typeface="Calibri"/>
               </a:rPr>
-              <a:t>Pista: Pensá en capturar con la torre sobre una pieza defendida en el centro-izquierda del tablero.</a:t>
+              <a:t>Pista: Piensa en capturar con la torre sobre una pieza defendida en el centro-izquierda del tablero.</a:t>
             </a:r>
           </a:p>
         </p:txBody>
@@ -4668,7 +4668,7 @@
                 </a:solidFill>
                 <a:latin typeface="Calibri"/>
               </a:rPr>
-              <a:t>Pista: Pensá en avanzar el peón central una casilla más, ofreciéndolo como sacrificio.</a:t>
+              <a:t>Pista: Piensa en avanzar el peón central una casilla más, ofreciéndolo como sacrificio.</a:t>
             </a:r>
           </a:p>
         </p:txBody>
@@ -4991,7 +4991,7 @@
                 </a:solidFill>
                 <a:latin typeface="Calibri"/>
               </a:rPr>
-              <a:t>Pista: Pensá en entregar la torre con jaque, obligando al rey a capturarla.</a:t>
+              <a:t>Pista: Piensa en entregar la torre con jaque, obligando al rey a capturarla.</a:t>
             </a:r>
           </a:p>
         </p:txBody>
@@ -6021,7 +6021,7 @@
                 </a:solidFill>
                 <a:latin typeface="Calibri"/>
               </a:rPr>
-              <a:t>Pista: Pensá en capturar con la torre sobre un peón central bien defendido.</a:t>
+              <a:t>Pista: Piensa en capturar con la torre sobre un peón central bien defendido.</a:t>
             </a:r>
           </a:p>
         </p:txBody>
@@ -6344,7 +6344,7 @@
                 </a:solidFill>
                 <a:latin typeface="Calibri"/>
               </a:rPr>
-              <a:t>Pista: Pensá en un jaque de alfil desde una casilla cercana al rey negro, que no deje alternativas razonables.</a:t>
+              <a:t>Pista: Piensa en un jaque de alfil desde una casilla cercana al rey negro, que no deje alternativas razonables.</a:t>
             </a:r>
           </a:p>
         </p:txBody>
@@ -7199,7 +7199,7 @@
                 </a:solidFill>
                 <a:latin typeface="Calibri"/>
               </a:rPr>
-              <a:t>Pista: Pensá en un nuevo avance de peón en el flanco de dama que abra líneas hacia los peones débiles negros.</a:t>
+              <a:t>Pista: Piensa en un nuevo avance de peón en el flanco de dama que abra líneas hacia los peones débiles negros.</a:t>
             </a:r>
           </a:p>
         </p:txBody>
@@ -8054,7 +8054,7 @@
                 </a:solidFill>
                 <a:latin typeface="Calibri"/>
               </a:rPr>
-              <a:t>Pista: Pensá en un nuevo avance de peón en el flanco de dama que gane más espacio antes de resolver la tensión.</a:t>
+              <a:t>Pista: Piensa en un nuevo avance de peón en el flanco de dama que gane más espacio antes de resolver la tensión.</a:t>
             </a:r>
           </a:p>
         </p:txBody>
@@ -8536,7 +8536,7 @@
                 </a:solidFill>
                 <a:latin typeface="Calibri"/>
               </a:rPr>
-              <a:t>Pista: Pensá en capturar con un peón central sobre la casilla f5, abriendo líneas hacia el enroque negro.</a:t>
+              <a:t>Pista: Piensa en capturar con un peón central sobre la casilla f5, abriendo líneas hacia el enroque negro.</a:t>
             </a:r>
           </a:p>
         </p:txBody>
@@ -9391,7 +9391,7 @@
                 </a:solidFill>
                 <a:latin typeface="Calibri"/>
               </a:rPr>
-              <a:t>Pista: Pensá en reubicar el alfil hacia una casilla desde la que pueda entrar en f7 en la próxima jugada.</a:t>
+              <a:t>Pista: Piensa en reubicar el alfil hacia una casilla desde la que pueda entrar en f7 en la próxima jugada.</a:t>
             </a:r>
           </a:p>
         </p:txBody>
@@ -9714,7 +9714,7 @@
                 </a:solidFill>
                 <a:latin typeface="Calibri"/>
               </a:rPr>
-              <a:t>Pista: Pensá en capturar con el alfil un peón negro que está defendido sólo por el rey.</a:t>
+              <a:t>Pista: Piensa en capturar con el alfil un peón negro que está defendido sólo por el rey.</a:t>
             </a:r>
           </a:p>
         </p:txBody>
@@ -10110,7 +10110,7 @@
                 </a:solidFill>
                 <a:latin typeface="Calibri"/>
               </a:rPr>
-              <a:t>Elegí tres de los fragmentos de esta lección y, antes de mover una sola pieza en el tablero, escribí en una frase qué desequilibrio te parece más favorable y para quién. Después jugá cada posición contra el motor y compará su evaluación con tu diagnóstico inicial, prestando atención a Caruana–Naiditsch y al efecto de 31.Qd3!.</a:t>
+              <a:t>Elige tres de los fragmentos de esta lección y, antes de mover una sola pieza en el tablero, escribe en una frase qué desequilibrio te parece más favorable y para quién. Después juega cada posición contra el motor y compará su evaluación con tu diagnóstico inicial, prestando atención a Caruana–Naiditsch y al efecto de 31.Dd3!.</a:t>
             </a:r>
           </a:p>
           <a:p>
@@ -10142,7 +10142,7 @@
                 </a:solidFill>
                 <a:latin typeface="Calibri"/>
               </a:rPr>
-              <a:t>En la página del curso podés recorrer cada partida con los comentarios, adivinar las jugadas clave en el tablero y continuar cualquier posición contra el motor (Stockfish). La hoja de ejercicios en PDF reúne los momentos clave de esta lección para resolver sin tablero.</a:t>
+              <a:t>En la página del curso puedes recorrer cada partida con los comentarios, adivinar las jugadas clave en el tablero y continuar cualquier posición contra el motor (Stockfish). La hoja de ejercicios en PDF reúne los momentos clave de esta lección para resolver sin tablero.</a:t>
             </a:r>
           </a:p>
         </p:txBody>
@@ -10181,7 +10181,7 @@
                 </a:solidFill>
                 <a:latin typeface="Calibri"/>
               </a:rPr>
-              <a:t>•  Primero recorré la partida completa leyendo los comentarios.</a:t>
+              <a:t>•  Primero recorre la partida completa leyendo los comentarios.</a:t>
             </a:r>
           </a:p>
           <a:p>
@@ -10197,7 +10197,7 @@
                 </a:solidFill>
                 <a:latin typeface="Calibri"/>
               </a:rPr>
-              <a:t>•  Después hacé el modo "adivinar las jugadas clave" hasta acertar todas.</a:t>
+              <a:t>•  Después haz el modo "adivinar las jugadas clave" hasta acertar todas.</a:t>
             </a:r>
           </a:p>
           <a:p>
@@ -10213,7 +10213,7 @@
                 </a:solidFill>
                 <a:latin typeface="Calibri"/>
               </a:rPr>
-              <a:t>•  Por último respondé el cuestionario y anotá con tus palabras las reglas de la lección.</a:t>
+              <a:t>•  Por último responde el cuestionario y anota con tus palabras las reglas de la lección.</a:t>
             </a:r>
           </a:p>
         </p:txBody>
@@ -10515,7 +10515,7 @@
                 </a:solidFill>
                 <a:latin typeface="Calibri"/>
               </a:rPr>
-              <a:t>Caruana–Naiditsch es el ejemplo más citado del grupo: el sacrificio de peón 31.Qd3! crea una posición ganadora prácticamente de la nada, mostrando en su forma más pura la idea de pensar más allá del material inmediato. El resto de los fragmentos de la lección (entre ellos Flores Rios–Diaz, Artemiev–Izoria, Carlsen–Esipenko, Arancibia–Flores Rios y Giri–Vachier-Lagrave) recorren, en formato breve, varios de los desequilibrios ya vistos en el curso, sirviendo como entrenamiento de reconocimiento rápido de patrones antes de entrar en la última lección.</a:t>
+              <a:t>Caruana–Naiditsch es el ejemplo más citado del grupo: el sacrificio de peón 31.Dd3! crea una posición ganadora prácticamente de la nada, mostrando en su forma más pura la idea de pensar más allá del material inmediato. El resto de los fragmentos de la lección (entre ellos Flores Rios–Diaz, Artemiev–Izoria, Carlsen–Esipenko, Arancibia–Flores Rios y Giri–Vachier-Lagrave) recorren, en formato breve, varios de los desequilibrios ya vistos en el curso, sirviendo como entrenamiento de reconocimiento rápido de patrones antes de entrar en la última lección.</a:t>
             </a:r>
           </a:p>
         </p:txBody>
@@ -10658,7 +10658,7 @@
                 </a:solidFill>
                 <a:latin typeface="Calibri"/>
               </a:rPr>
-              <a:t>•  Frente a cualquier posición, preguntate primero qué desequilibrio resultaría de cada cambio posible.</a:t>
+              <a:t>•  Frente a cualquier posición, pregúntate primero qué desequilibrio resultaría de cada cambio posible.</a:t>
             </a:r>
           </a:p>
           <a:p>
@@ -10674,7 +10674,7 @@
                 </a:solidFill>
                 <a:latin typeface="Calibri"/>
               </a:rPr>
-              <a:t>•  Evaluá antes de calcular: decidí qué bando tiene el plan más claro antes de buscar variantes concretas.</a:t>
+              <a:t>•  Evalúa antes de calcular: decide qué bando tiene el plan más claro antes de buscar variantes concretas.</a:t>
             </a:r>
           </a:p>
           <a:p>
@@ -10706,7 +10706,7 @@
                 </a:solidFill>
                 <a:latin typeface="Calibri"/>
               </a:rPr>
-              <a:t>•  No apliques mecánicamente un principio aprendido: verificá que corresponda al tipo exacto de posición.</a:t>
+              <a:t>•  No apliques mecánicamente un principio aprendido: verifica que corresponda al tipo exacto de posición.</a:t>
             </a:r>
           </a:p>
           <a:p>
@@ -10722,7 +10722,7 @@
                 </a:solidFill>
                 <a:latin typeface="Calibri"/>
               </a:rPr>
-              <a:t>•  Usá estos ejemplos breves como entrenamiento de reconocimiento rápido, no como partidas para memorizar de memoria.</a:t>
+              <a:t>•  Usa estos ejemplos breves como entrenamiento de reconocimiento rápido, no como partidas para memorizar de memoria.</a:t>
             </a:r>
           </a:p>
         </p:txBody>
@@ -11324,7 +11324,7 @@
                 </a:solidFill>
                 <a:latin typeface="Calibri"/>
               </a:rPr>
-              <a:t>Pista: Pensá en una jugada de dama que no capture el peón c4, sino que se reubique, ofreciendo material a cambio de actividad.</a:t>
+              <a:t>Pista: Piensa en una jugada de dama que no capture el peón c4, sino que se reubique, ofreciendo material a cambio de actividad.</a:t>
             </a:r>
           </a:p>
         </p:txBody>
